--- a/02-Terraform/Session1/02-01-Terraform-Foundations.pptx
+++ b/02-Terraform/Session1/02-01-Terraform-Foundations.pptx
@@ -11177,7 +11177,7 @@
                 <a:ea typeface="Arial" pitchFamily="34" charset="-122"/>
                 <a:cs typeface="Arial" pitchFamily="34" charset="-120"/>
               </a:rPr>
-              <a:t>On plan: Terraform reads .tf (desired) + .tfstate (current) and emits create / update / replace / destroy actions — it does NOT scan the cloud every time.</a:t>
+              <a:t>On plan: Terraform reads .tf (desired) + .tfstate (current) and emits create / update / replace / destroy actions.</a:t>
             </a:r>
             <a:endParaRPr lang="en-US" sz="1100" dirty="0"/>
           </a:p>
